--- a/decks/combined-waves/combined-waves_ch3_wave-equation.pptx
+++ b/decks/combined-waves/combined-waves_ch3_wave-equation.pptx
@@ -121,47 +121,47 @@
   <p:extLst>
     <p:ext uri="{521415D9-36F7-43E2-AB2F-B90AF26B5E84}">
       <p14:sectionLst xmlns:p14="http://schemas.microsoft.com/office/powerpoint/2010/main">
-        <p14:section name="Opening" id="{67ebbe01-7ffd-4cce-17a1-8eaf7274d5cb}">
+        <p14:section name="Opening" id="{3f09c209-3566-12be-f6fc-5acdff5d2d24}">
           <p14:sldIdLst>
             <p14:sldId id="256"/>
           </p14:sldIdLst>
         </p14:section>
-        <p14:section name="Gate" id="{ddf7ee7a-6703-778e-eb2f-23de742f53a5}">
+        <p14:section name="Gate" id="{100efce3-4cf7-82b7-1779-ccfeeb2f8edf}">
           <p14:sldIdLst>
             <p14:sldId id="257"/>
             <p14:sldId id="258"/>
           </p14:sldIdLst>
         </p14:section>
-        <p14:section name="Pre-teach" id="{9860cc71-16d9-7d56-386a-ac2c0dff0df2}">
+        <p14:section name="Pre-teach" id="{6b2adff0-f310-fbbe-45ba-75103b2ca326}">
           <p14:sldIdLst>
             <p14:sldId id="259"/>
           </p14:sldIdLst>
         </p14:section>
-        <p14:section name="Read-along" id="{a2b94188-fbd0-1038-ef6e-3fc9ef9f465a}">
+        <p14:section name="Read-along" id="{848391c5-bc65-a5c2-1393-a8040acc4f70}">
           <p14:sldIdLst>
             <p14:sldId id="260"/>
             <p14:sldId id="261"/>
           </p14:sldIdLst>
         </p14:section>
-        <p14:section name="Teach" id="{58d9e6ad-c08d-0037-adcc-9600d5e559dc}">
+        <p14:section name="Teach" id="{4f97a9cf-cdb4-ff12-7339-d9ec24f838f9}">
           <p14:sldIdLst>
             <p14:sldId id="262"/>
             <p14:sldId id="263"/>
             <p14:sldId id="264"/>
           </p14:sldIdLst>
         </p14:section>
-        <p14:section name="Routes" id="{5ba68760-e455-4116-9183-80ebaf671aee}">
+        <p14:section name="Routes" id="{c3bb998e-3501-2cce-7c69-fedfcb2e47fd}">
           <p14:sldIdLst>
             <p14:sldId id="265"/>
             <p14:sldId id="266"/>
           </p14:sldIdLst>
         </p14:section>
-        <p14:section name="Close" id="{15ce2a6b-9223-a4d9-00ce-d48f03fe3f25}">
+        <p14:section name="Close" id="{59dfb9bf-0f2b-113e-bdee-620b825ac331}">
           <p14:sldIdLst>
             <p14:sldId id="267"/>
           </p14:sldIdLst>
         </p14:section>
-        <p14:section name="Answers" id="{ab3d7d24-05ba-605f-8c9c-ad8c12950eb4}">
+        <p14:section name="Answers" id="{837fc61e-9d79-257d-b9a8-f06c56cc4166}">
           <p14:sldIdLst>
             <p14:sldId id="268"/>
             <p14:sldId id="269"/>
@@ -1218,7 +1218,7 @@
               <a:rPr lang="en-US" dirty="0"/>
               <a:t>Do now — retrieval. Silent, no notes, no help: recall comes before any support. Give about four minutes.
 1. A wave has a frequency of 5 Hz and a wavelength of 2 m. Calculate its speed in metres per second.  →  10 m/s
-2. Which equation is the wave equation?  →  A   wave speed = frequency × wavelength
+2. Which equation is the wave equation?  →  B   wave speed = frequency × wavelength
 3. 1 kHz is the same as ___ Hz.  →  1000
 Circulate: who gets 3/3 (Stretch route), 2/3 (Core), 0–1 (Support)? Use this to route pupils later in the lesson.</a:t>
             </a:r>
@@ -1310,7 +1310,7 @@
               <a:rPr lang="en-US" dirty="0"/>
               <a:t>Answers — pupils mark their own in a different colour, then hands up for 3/3, 2/3, 1/3.
 1. 10 m/s. v = f λ = 5 × 2 = 10 m/s. Whole-number data, so a whole-number answer.
-2. A   wave speed = frequency × wavelength. v = f λ: wave speed equals frequency multiplied by wavelength.
+2. B   wave speed = frequency × wavelength. v = f λ: wave speed equals frequency multiplied by wavelength.
 3. 1000. Kilo means a thousand: 1 kHz = 1000 Hz.
 Say the route each score points to: 3/3 Stretch, 2/3 Core, 0–1 Support. Pupils may choose to move up.</a:t>
             </a:r>
@@ -7825,7 +7825,7 @@
                 <a:ea typeface="Calibri" pitchFamily="34" charset="-122"/>
                 <a:cs typeface="Calibri" pitchFamily="34" charset="-120"/>
               </a:rPr>
-              <a:t>wave speed = frequency × wavelength</a:t>
+              <a:t>wave speed = frequency ÷ wavelength</a:t>
             </a:r>
             <a:endParaRPr lang="en-US" sz="1800" dirty="0"/>
           </a:p>
@@ -7862,7 +7862,7 @@
                 <a:ea typeface="Calibri" pitchFamily="34" charset="-122"/>
                 <a:cs typeface="Calibri" pitchFamily="34" charset="-120"/>
               </a:rPr>
-              <a:t>wave speed = frequency ÷ wavelength</a:t>
+              <a:t>wave speed = frequency × wavelength</a:t>
             </a:r>
             <a:endParaRPr lang="en-US" sz="1800" dirty="0"/>
           </a:p>
@@ -8785,7 +8785,7 @@
                 <a:ea typeface="Calibri" pitchFamily="34" charset="-122"/>
                 <a:cs typeface="Calibri" pitchFamily="34" charset="-120"/>
               </a:rPr>
-              <a:t>A   wave speed = frequency × wavelength</a:t>
+              <a:t>B   wave speed = frequency × wavelength</a:t>
             </a:r>
             <a:endParaRPr lang="en-US" sz="2200" dirty="0"/>
           </a:p>

--- a/decks/combined-waves/combined-waves_ch3_wave-equation.pptx
+++ b/decks/combined-waves/combined-waves_ch3_wave-equation.pptx
@@ -121,47 +121,47 @@
   <p:extLst>
     <p:ext uri="{521415D9-36F7-43E2-AB2F-B90AF26B5E84}">
       <p14:sectionLst xmlns:p14="http://schemas.microsoft.com/office/powerpoint/2010/main">
-        <p14:section name="Opening" id="{3f09c209-3566-12be-f6fc-5acdff5d2d24}">
+        <p14:section name="Opening" id="{2bf2113b-ce3b-1595-6538-d80192adf8c0}">
           <p14:sldIdLst>
             <p14:sldId id="256"/>
           </p14:sldIdLst>
         </p14:section>
-        <p14:section name="Gate" id="{100efce3-4cf7-82b7-1779-ccfeeb2f8edf}">
+        <p14:section name="Gate" id="{35996545-9d52-c6b8-256d-df40e7c46653}">
           <p14:sldIdLst>
             <p14:sldId id="257"/>
             <p14:sldId id="258"/>
           </p14:sldIdLst>
         </p14:section>
-        <p14:section name="Pre-teach" id="{6b2adff0-f310-fbbe-45ba-75103b2ca326}">
+        <p14:section name="Pre-teach" id="{8b47c2f0-a541-aa1e-30de-8c6e0375b5fc}">
           <p14:sldIdLst>
             <p14:sldId id="259"/>
           </p14:sldIdLst>
         </p14:section>
-        <p14:section name="Read-along" id="{848391c5-bc65-a5c2-1393-a8040acc4f70}">
+        <p14:section name="Read-along" id="{772ee62e-68ae-77d3-4cc4-d10684e1938d}">
           <p14:sldIdLst>
             <p14:sldId id="260"/>
             <p14:sldId id="261"/>
           </p14:sldIdLst>
         </p14:section>
-        <p14:section name="Teach" id="{4f97a9cf-cdb4-ff12-7339-d9ec24f838f9}">
+        <p14:section name="Teach" id="{caad2f9a-ee61-db79-0f40-5f85e81ebc55}">
           <p14:sldIdLst>
             <p14:sldId id="262"/>
             <p14:sldId id="263"/>
             <p14:sldId id="264"/>
           </p14:sldIdLst>
         </p14:section>
-        <p14:section name="Routes" id="{c3bb998e-3501-2cce-7c69-fedfcb2e47fd}">
+        <p14:section name="Routes" id="{d51ee2fe-66f9-617f-c667-fdf8697ef8f3}">
           <p14:sldIdLst>
             <p14:sldId id="265"/>
             <p14:sldId id="266"/>
           </p14:sldIdLst>
         </p14:section>
-        <p14:section name="Close" id="{59dfb9bf-0f2b-113e-bdee-620b825ac331}">
+        <p14:section name="Close" id="{2bc527f2-dc1e-0ca9-d991-57ce92d7360a}">
           <p14:sldIdLst>
             <p14:sldId id="267"/>
           </p14:sldIdLst>
         </p14:section>
-        <p14:section name="Answers" id="{837fc61e-9d79-257d-b9a8-f06c56cc4166}">
+        <p14:section name="Answers" id="{194caf8e-a7f7-436b-f277-41ecbb234f8c}">
           <p14:sldIdLst>
             <p14:sldId id="268"/>
             <p14:sldId id="269"/>
